--- a/presentation.pptx
+++ b/presentation.pptx
@@ -6,33 +6,36 @@
   </p:sldMasterIdLst>
   <p:sldIdLst>
     <p:sldId id="256" r:id="rId2"/>
-    <p:sldId id="259" r:id="rId3"/>
-    <p:sldId id="262" r:id="rId4"/>
-    <p:sldId id="266" r:id="rId5"/>
-    <p:sldId id="261" r:id="rId6"/>
-    <p:sldId id="276" r:id="rId7"/>
-    <p:sldId id="277" r:id="rId8"/>
-    <p:sldId id="288" r:id="rId9"/>
-    <p:sldId id="263" r:id="rId10"/>
-    <p:sldId id="269" r:id="rId11"/>
-    <p:sldId id="270" r:id="rId12"/>
-    <p:sldId id="265" r:id="rId13"/>
-    <p:sldId id="271" r:id="rId14"/>
-    <p:sldId id="273" r:id="rId15"/>
-    <p:sldId id="264" r:id="rId16"/>
-    <p:sldId id="282" r:id="rId17"/>
-    <p:sldId id="281" r:id="rId18"/>
-    <p:sldId id="257" r:id="rId19"/>
-    <p:sldId id="272" r:id="rId20"/>
-    <p:sldId id="283" r:id="rId21"/>
-    <p:sldId id="274" r:id="rId22"/>
-    <p:sldId id="275" r:id="rId23"/>
-    <p:sldId id="286" r:id="rId24"/>
-    <p:sldId id="285" r:id="rId25"/>
-    <p:sldId id="279" r:id="rId26"/>
-    <p:sldId id="287" r:id="rId27"/>
-    <p:sldId id="290" r:id="rId28"/>
-    <p:sldId id="289" r:id="rId29"/>
+    <p:sldId id="291" r:id="rId3"/>
+    <p:sldId id="293" r:id="rId4"/>
+    <p:sldId id="292" r:id="rId5"/>
+    <p:sldId id="259" r:id="rId6"/>
+    <p:sldId id="262" r:id="rId7"/>
+    <p:sldId id="266" r:id="rId8"/>
+    <p:sldId id="261" r:id="rId9"/>
+    <p:sldId id="276" r:id="rId10"/>
+    <p:sldId id="277" r:id="rId11"/>
+    <p:sldId id="288" r:id="rId12"/>
+    <p:sldId id="263" r:id="rId13"/>
+    <p:sldId id="269" r:id="rId14"/>
+    <p:sldId id="270" r:id="rId15"/>
+    <p:sldId id="265" r:id="rId16"/>
+    <p:sldId id="271" r:id="rId17"/>
+    <p:sldId id="273" r:id="rId18"/>
+    <p:sldId id="264" r:id="rId19"/>
+    <p:sldId id="282" r:id="rId20"/>
+    <p:sldId id="281" r:id="rId21"/>
+    <p:sldId id="257" r:id="rId22"/>
+    <p:sldId id="272" r:id="rId23"/>
+    <p:sldId id="283" r:id="rId24"/>
+    <p:sldId id="274" r:id="rId25"/>
+    <p:sldId id="275" r:id="rId26"/>
+    <p:sldId id="286" r:id="rId27"/>
+    <p:sldId id="285" r:id="rId28"/>
+    <p:sldId id="279" r:id="rId29"/>
+    <p:sldId id="287" r:id="rId30"/>
+    <p:sldId id="290" r:id="rId31"/>
+    <p:sldId id="289" r:id="rId32"/>
   </p:sldIdLst>
   <p:sldSz cx="12192000" cy="6858000"/>
   <p:notesSz cx="6858000" cy="9144000"/>
@@ -286,7 +289,7 @@
           <a:p>
             <a:fld id="{F88B4CF7-4AF6-4F22-BEAD-2FF1E49FC008}" type="datetimeFigureOut">
               <a:rPr lang="ru-RU" smtClean="0"/>
-              <a:t>06.03.2025</a:t>
+              <a:t>25.03.2025</a:t>
             </a:fld>
             <a:endParaRPr lang="ru-RU"/>
           </a:p>
@@ -484,7 +487,7 @@
           <a:p>
             <a:fld id="{F88B4CF7-4AF6-4F22-BEAD-2FF1E49FC008}" type="datetimeFigureOut">
               <a:rPr lang="ru-RU" smtClean="0"/>
-              <a:t>06.03.2025</a:t>
+              <a:t>25.03.2025</a:t>
             </a:fld>
             <a:endParaRPr lang="ru-RU"/>
           </a:p>
@@ -692,7 +695,7 @@
           <a:p>
             <a:fld id="{F88B4CF7-4AF6-4F22-BEAD-2FF1E49FC008}" type="datetimeFigureOut">
               <a:rPr lang="ru-RU" smtClean="0"/>
-              <a:t>06.03.2025</a:t>
+              <a:t>25.03.2025</a:t>
             </a:fld>
             <a:endParaRPr lang="ru-RU"/>
           </a:p>
@@ -890,7 +893,7 @@
           <a:p>
             <a:fld id="{F88B4CF7-4AF6-4F22-BEAD-2FF1E49FC008}" type="datetimeFigureOut">
               <a:rPr lang="ru-RU" smtClean="0"/>
-              <a:t>06.03.2025</a:t>
+              <a:t>25.03.2025</a:t>
             </a:fld>
             <a:endParaRPr lang="ru-RU"/>
           </a:p>
@@ -1165,7 +1168,7 @@
           <a:p>
             <a:fld id="{F88B4CF7-4AF6-4F22-BEAD-2FF1E49FC008}" type="datetimeFigureOut">
               <a:rPr lang="ru-RU" smtClean="0"/>
-              <a:t>06.03.2025</a:t>
+              <a:t>25.03.2025</a:t>
             </a:fld>
             <a:endParaRPr lang="ru-RU"/>
           </a:p>
@@ -1430,7 +1433,7 @@
           <a:p>
             <a:fld id="{F88B4CF7-4AF6-4F22-BEAD-2FF1E49FC008}" type="datetimeFigureOut">
               <a:rPr lang="ru-RU" smtClean="0"/>
-              <a:t>06.03.2025</a:t>
+              <a:t>25.03.2025</a:t>
             </a:fld>
             <a:endParaRPr lang="ru-RU"/>
           </a:p>
@@ -1842,7 +1845,7 @@
           <a:p>
             <a:fld id="{F88B4CF7-4AF6-4F22-BEAD-2FF1E49FC008}" type="datetimeFigureOut">
               <a:rPr lang="ru-RU" smtClean="0"/>
-              <a:t>06.03.2025</a:t>
+              <a:t>25.03.2025</a:t>
             </a:fld>
             <a:endParaRPr lang="ru-RU"/>
           </a:p>
@@ -1983,7 +1986,7 @@
           <a:p>
             <a:fld id="{F88B4CF7-4AF6-4F22-BEAD-2FF1E49FC008}" type="datetimeFigureOut">
               <a:rPr lang="ru-RU" smtClean="0"/>
-              <a:t>06.03.2025</a:t>
+              <a:t>25.03.2025</a:t>
             </a:fld>
             <a:endParaRPr lang="ru-RU"/>
           </a:p>
@@ -2096,7 +2099,7 @@
           <a:p>
             <a:fld id="{F88B4CF7-4AF6-4F22-BEAD-2FF1E49FC008}" type="datetimeFigureOut">
               <a:rPr lang="ru-RU" smtClean="0"/>
-              <a:t>06.03.2025</a:t>
+              <a:t>25.03.2025</a:t>
             </a:fld>
             <a:endParaRPr lang="ru-RU"/>
           </a:p>
@@ -2407,7 +2410,7 @@
           <a:p>
             <a:fld id="{F88B4CF7-4AF6-4F22-BEAD-2FF1E49FC008}" type="datetimeFigureOut">
               <a:rPr lang="ru-RU" smtClean="0"/>
-              <a:t>06.03.2025</a:t>
+              <a:t>25.03.2025</a:t>
             </a:fld>
             <a:endParaRPr lang="ru-RU"/>
           </a:p>
@@ -2695,7 +2698,7 @@
           <a:p>
             <a:fld id="{F88B4CF7-4AF6-4F22-BEAD-2FF1E49FC008}" type="datetimeFigureOut">
               <a:rPr lang="ru-RU" smtClean="0"/>
-              <a:t>06.03.2025</a:t>
+              <a:t>25.03.2025</a:t>
             </a:fld>
             <a:endParaRPr lang="ru-RU"/>
           </a:p>
@@ -2936,7 +2939,7 @@
           <a:p>
             <a:fld id="{F88B4CF7-4AF6-4F22-BEAD-2FF1E49FC008}" type="datetimeFigureOut">
               <a:rPr lang="ru-RU" smtClean="0"/>
-              <a:t>06.03.2025</a:t>
+              <a:t>25.03.2025</a:t>
             </a:fld>
             <a:endParaRPr lang="ru-RU"/>
           </a:p>
@@ -3369,14 +3372,26 @@
             <p:ph type="ctrTitle"/>
           </p:nvPr>
         </p:nvSpPr>
-        <p:spPr/>
+        <p:spPr>
+          <a:xfrm>
+            <a:off x="1524000" y="1452218"/>
+            <a:ext cx="9144000" cy="2387600"/>
+          </a:xfrm>
+        </p:spPr>
         <p:txBody>
           <a:bodyPr/>
           <a:lstStyle/>
           <a:p>
             <a:r>
               <a:rPr lang="ru-RU" dirty="0"/>
-              <a:t>Расстановка охранников в художественной галерее</a:t>
+              <a:t>Расстановка охранников </a:t>
+            </a:r>
+            <a:br>
+              <a:rPr lang="ru-RU" dirty="0"/>
+            </a:br>
+            <a:r>
+              <a:rPr lang="ru-RU" dirty="0"/>
+              <a:t>в художественной галерее</a:t>
             </a:r>
           </a:p>
         </p:txBody>
@@ -3397,26 +3412,39 @@
             <p:ph type="subTitle" idx="1"/>
           </p:nvPr>
         </p:nvSpPr>
-        <p:spPr/>
-        <p:txBody>
-          <a:bodyPr/>
+        <p:spPr>
+          <a:xfrm>
+            <a:off x="1524000" y="4211982"/>
+            <a:ext cx="9144000" cy="2387599"/>
+          </a:xfrm>
+        </p:spPr>
+        <p:txBody>
+          <a:bodyPr>
+            <a:normAutofit/>
+          </a:bodyPr>
           <a:lstStyle/>
           <a:p>
             <a:r>
               <a:rPr lang="ru-RU" dirty="0"/>
-              <a:t>студент группы ПС–21</a:t>
-            </a:r>
-          </a:p>
-          <a:p>
-            <a:r>
-              <a:rPr lang="ru-RU" dirty="0"/>
-              <a:t>очной формы обучения</a:t>
+              <a:t>студент группы ПС–21 очной формы обучения</a:t>
             </a:r>
           </a:p>
           <a:p>
             <a:r>
               <a:rPr lang="ru-RU" dirty="0"/>
               <a:t>Глухарев Степан Викторович</a:t>
+            </a:r>
+          </a:p>
+          <a:p>
+            <a:r>
+              <a:rPr lang="ru-RU" dirty="0"/>
+              <a:t>руководитель доцент, кандидат физ-мат наук</a:t>
+            </a:r>
+          </a:p>
+          <a:p>
+            <a:r>
+              <a:rPr lang="ru-RU" dirty="0"/>
+              <a:t>Козлов Александр Иванович</a:t>
             </a:r>
           </a:p>
           <a:p>
@@ -3438,6 +3466,374 @@
 </file>
 
 <file path=ppt/slides/slide10.xml><?xml version="1.0" encoding="utf-8"?>
+<p:sld xmlns:a="http://schemas.openxmlformats.org/drawingml/2006/main" xmlns:r="http://schemas.openxmlformats.org/officeDocument/2006/relationships" xmlns:p="http://schemas.openxmlformats.org/presentationml/2006/main">
+  <p:cSld>
+    <p:spTree>
+      <p:nvGrpSpPr>
+        <p:cNvPr id="1" name=""/>
+        <p:cNvGrpSpPr/>
+        <p:nvPr/>
+      </p:nvGrpSpPr>
+      <p:grpSpPr>
+        <a:xfrm>
+          <a:off x="0" y="0"/>
+          <a:ext cx="0" cy="0"/>
+          <a:chOff x="0" y="0"/>
+          <a:chExt cx="0" cy="0"/>
+        </a:xfrm>
+      </p:grpSpPr>
+      <p:sp>
+        <p:nvSpPr>
+          <p:cNvPr id="2" name="Заголовок 1">
+            <a:extLst>
+              <a:ext uri="{FF2B5EF4-FFF2-40B4-BE49-F238E27FC236}">
+                <a16:creationId xmlns:a16="http://schemas.microsoft.com/office/drawing/2014/main" id="{26D51D08-4E36-3C59-C285-A89819162EA3}"/>
+              </a:ext>
+            </a:extLst>
+          </p:cNvPr>
+          <p:cNvSpPr>
+            <a:spLocks noGrp="1"/>
+          </p:cNvSpPr>
+          <p:nvPr>
+            <p:ph type="title"/>
+          </p:nvPr>
+        </p:nvSpPr>
+        <p:spPr/>
+        <p:txBody>
+          <a:bodyPr/>
+          <a:lstStyle/>
+          <a:p>
+            <a:r>
+              <a:rPr lang="ru-RU" dirty="0"/>
+              <a:t>Выпуклые многоугольники</a:t>
+            </a:r>
+          </a:p>
+        </p:txBody>
+      </p:sp>
+      <p:pic>
+        <p:nvPicPr>
+          <p:cNvPr id="5" name="Объект 4" descr="Изображение выглядит как диаграмма, линия, снимок экрана, дизайн&#10;&#10;Автоматически созданное описание">
+            <a:extLst>
+              <a:ext uri="{FF2B5EF4-FFF2-40B4-BE49-F238E27FC236}">
+                <a16:creationId xmlns:a16="http://schemas.microsoft.com/office/drawing/2014/main" id="{68ED7B39-277F-BE76-73A7-F2C29BF8099B}"/>
+              </a:ext>
+            </a:extLst>
+          </p:cNvPr>
+          <p:cNvPicPr>
+            <a:picLocks noGrp="1" noChangeAspect="1"/>
+          </p:cNvPicPr>
+          <p:nvPr>
+            <p:ph idx="1"/>
+          </p:nvPr>
+        </p:nvPicPr>
+        <p:blipFill>
+          <a:blip r:embed="rId2">
+            <a:extLst>
+              <a:ext uri="{28A0092B-C50C-407E-A947-70E740481C1C}">
+                <a14:useLocalDpi xmlns:a14="http://schemas.microsoft.com/office/drawing/2010/main" val="0"/>
+              </a:ext>
+            </a:extLst>
+          </a:blip>
+          <a:stretch>
+            <a:fillRect/>
+          </a:stretch>
+        </p:blipFill>
+        <p:spPr>
+          <a:xfrm>
+            <a:off x="5260498" y="1510054"/>
+            <a:ext cx="5449247" cy="3392812"/>
+          </a:xfrm>
+        </p:spPr>
+      </p:pic>
+      <p:pic>
+        <p:nvPicPr>
+          <p:cNvPr id="7" name="Рисунок 6" descr="Изображение выглядит как треугольник, линия&#10;&#10;Автоматически созданное описание">
+            <a:extLst>
+              <a:ext uri="{FF2B5EF4-FFF2-40B4-BE49-F238E27FC236}">
+                <a16:creationId xmlns:a16="http://schemas.microsoft.com/office/drawing/2014/main" id="{5C2287FC-D039-C102-88C4-24C7D5427978}"/>
+              </a:ext>
+            </a:extLst>
+          </p:cNvPr>
+          <p:cNvPicPr>
+            <a:picLocks noChangeAspect="1"/>
+          </p:cNvPicPr>
+          <p:nvPr/>
+        </p:nvPicPr>
+        <p:blipFill>
+          <a:blip r:embed="rId3">
+            <a:extLst>
+              <a:ext uri="{28A0092B-C50C-407E-A947-70E740481C1C}">
+                <a14:useLocalDpi xmlns:a14="http://schemas.microsoft.com/office/drawing/2010/main" val="0"/>
+              </a:ext>
+            </a:extLst>
+          </a:blip>
+          <a:stretch>
+            <a:fillRect/>
+          </a:stretch>
+        </p:blipFill>
+        <p:spPr>
+          <a:xfrm>
+            <a:off x="838200" y="1690688"/>
+            <a:ext cx="3564813" cy="3212178"/>
+          </a:xfrm>
+          <a:prstGeom prst="rect">
+            <a:avLst/>
+          </a:prstGeom>
+        </p:spPr>
+      </p:pic>
+      <p:sp>
+        <p:nvSpPr>
+          <p:cNvPr id="10" name="TextBox 9">
+            <a:extLst>
+              <a:ext uri="{FF2B5EF4-FFF2-40B4-BE49-F238E27FC236}">
+                <a16:creationId xmlns:a16="http://schemas.microsoft.com/office/drawing/2014/main" id="{36A6B241-AA3E-942F-EEDF-0E7B669FE535}"/>
+              </a:ext>
+            </a:extLst>
+          </p:cNvPr>
+          <p:cNvSpPr txBox="1"/>
+          <p:nvPr/>
+        </p:nvSpPr>
+        <p:spPr>
+          <a:xfrm>
+            <a:off x="1669815" y="5401464"/>
+            <a:ext cx="8852370" cy="646331"/>
+          </a:xfrm>
+          <a:prstGeom prst="rect">
+            <a:avLst/>
+          </a:prstGeom>
+          <a:noFill/>
+        </p:spPr>
+        <p:txBody>
+          <a:bodyPr wrap="square">
+            <a:spAutoFit/>
+          </a:bodyPr>
+          <a:lstStyle/>
+          <a:p>
+            <a:r>
+              <a:rPr lang="ru-RU" b="1" dirty="0"/>
+              <a:t>Лемма </a:t>
+            </a:r>
+            <a:r>
+              <a:rPr lang="ru-RU" dirty="0"/>
+              <a:t>- Каждый выпуклый компонент либо полностью виден, либо полностью не виден из вершины многоугольника.</a:t>
+            </a:r>
+          </a:p>
+        </p:txBody>
+      </p:sp>
+    </p:spTree>
+    <p:extLst>
+      <p:ext uri="{BB962C8B-B14F-4D97-AF65-F5344CB8AC3E}">
+        <p14:creationId xmlns:p14="http://schemas.microsoft.com/office/powerpoint/2010/main" val="462392401"/>
+      </p:ext>
+    </p:extLst>
+  </p:cSld>
+  <p:clrMapOvr>
+    <a:masterClrMapping/>
+  </p:clrMapOvr>
+</p:sld>
+</file>
+
+<file path=ppt/slides/slide11.xml><?xml version="1.0" encoding="utf-8"?>
+<p:sld xmlns:a="http://schemas.openxmlformats.org/drawingml/2006/main" xmlns:r="http://schemas.openxmlformats.org/officeDocument/2006/relationships" xmlns:p="http://schemas.openxmlformats.org/presentationml/2006/main">
+  <p:cSld>
+    <p:spTree>
+      <p:nvGrpSpPr>
+        <p:cNvPr id="1" name=""/>
+        <p:cNvGrpSpPr/>
+        <p:nvPr/>
+      </p:nvGrpSpPr>
+      <p:grpSpPr>
+        <a:xfrm>
+          <a:off x="0" y="0"/>
+          <a:ext cx="0" cy="0"/>
+          <a:chOff x="0" y="0"/>
+          <a:chExt cx="0" cy="0"/>
+        </a:xfrm>
+      </p:grpSpPr>
+      <p:sp>
+        <p:nvSpPr>
+          <p:cNvPr id="2" name="Заголовок 1">
+            <a:extLst>
+              <a:ext uri="{FF2B5EF4-FFF2-40B4-BE49-F238E27FC236}">
+                <a16:creationId xmlns:a16="http://schemas.microsoft.com/office/drawing/2014/main" id="{78CC4E43-432F-FF98-376F-55D04A47FC4A}"/>
+              </a:ext>
+            </a:extLst>
+          </p:cNvPr>
+          <p:cNvSpPr>
+            <a:spLocks noGrp="1"/>
+          </p:cNvSpPr>
+          <p:nvPr>
+            <p:ph type="title"/>
+          </p:nvPr>
+        </p:nvSpPr>
+        <p:spPr/>
+        <p:txBody>
+          <a:bodyPr/>
+          <a:lstStyle/>
+          <a:p>
+            <a:r>
+              <a:rPr lang="ru-RU" dirty="0"/>
+              <a:t>Многоугольник с покрытыми стенами</a:t>
+            </a:r>
+          </a:p>
+        </p:txBody>
+      </p:sp>
+      <p:pic>
+        <p:nvPicPr>
+          <p:cNvPr id="5" name="Объект 4" descr="Изображение выглядит как линия, диаграмма, Параллельный, График&#10;&#10;Автоматически созданное описание">
+            <a:extLst>
+              <a:ext uri="{FF2B5EF4-FFF2-40B4-BE49-F238E27FC236}">
+                <a16:creationId xmlns:a16="http://schemas.microsoft.com/office/drawing/2014/main" id="{7FBEAAA4-25BF-5F5A-A161-054399257F85}"/>
+              </a:ext>
+            </a:extLst>
+          </p:cNvPr>
+          <p:cNvPicPr>
+            <a:picLocks noGrp="1" noChangeAspect="1"/>
+          </p:cNvPicPr>
+          <p:nvPr>
+            <p:ph idx="1"/>
+          </p:nvPr>
+        </p:nvPicPr>
+        <p:blipFill>
+          <a:blip r:embed="rId2">
+            <a:extLst>
+              <a:ext uri="{28A0092B-C50C-407E-A947-70E740481C1C}">
+                <a14:useLocalDpi xmlns:a14="http://schemas.microsoft.com/office/drawing/2010/main" val="0"/>
+              </a:ext>
+            </a:extLst>
+          </a:blip>
+          <a:stretch>
+            <a:fillRect/>
+          </a:stretch>
+        </p:blipFill>
+        <p:spPr>
+          <a:xfrm>
+            <a:off x="4255049" y="1825625"/>
+            <a:ext cx="3681901" cy="4351338"/>
+          </a:xfrm>
+        </p:spPr>
+      </p:pic>
+    </p:spTree>
+    <p:extLst>
+      <p:ext uri="{BB962C8B-B14F-4D97-AF65-F5344CB8AC3E}">
+        <p14:creationId xmlns:p14="http://schemas.microsoft.com/office/powerpoint/2010/main" val="2571953755"/>
+      </p:ext>
+    </p:extLst>
+  </p:cSld>
+  <p:clrMapOvr>
+    <a:masterClrMapping/>
+  </p:clrMapOvr>
+</p:sld>
+</file>
+
+<file path=ppt/slides/slide12.xml><?xml version="1.0" encoding="utf-8"?>
+<p:sld xmlns:a="http://schemas.openxmlformats.org/drawingml/2006/main" xmlns:r="http://schemas.openxmlformats.org/officeDocument/2006/relationships" xmlns:p="http://schemas.openxmlformats.org/presentationml/2006/main">
+  <p:cSld>
+    <p:spTree>
+      <p:nvGrpSpPr>
+        <p:cNvPr id="1" name=""/>
+        <p:cNvGrpSpPr/>
+        <p:nvPr/>
+      </p:nvGrpSpPr>
+      <p:grpSpPr>
+        <a:xfrm>
+          <a:off x="0" y="0"/>
+          <a:ext cx="0" cy="0"/>
+          <a:chOff x="0" y="0"/>
+          <a:chExt cx="0" cy="0"/>
+        </a:xfrm>
+      </p:grpSpPr>
+      <p:sp>
+        <p:nvSpPr>
+          <p:cNvPr id="2" name="Заголовок 1">
+            <a:extLst>
+              <a:ext uri="{FF2B5EF4-FFF2-40B4-BE49-F238E27FC236}">
+                <a16:creationId xmlns:a16="http://schemas.microsoft.com/office/drawing/2014/main" id="{80B4E1DD-F430-E0D5-C82C-5B128FEB9912}"/>
+              </a:ext>
+            </a:extLst>
+          </p:cNvPr>
+          <p:cNvSpPr>
+            <a:spLocks noGrp="1"/>
+          </p:cNvSpPr>
+          <p:nvPr>
+            <p:ph type="title"/>
+          </p:nvPr>
+        </p:nvSpPr>
+        <p:spPr/>
+        <p:txBody>
+          <a:bodyPr/>
+          <a:lstStyle/>
+          <a:p>
+            <a:r>
+              <a:rPr lang="ru-RU" dirty="0"/>
+              <a:t>Разрешима ли задача?</a:t>
+            </a:r>
+          </a:p>
+        </p:txBody>
+      </p:sp>
+      <p:sp>
+        <p:nvSpPr>
+          <p:cNvPr id="3" name="Текст 2">
+            <a:extLst>
+              <a:ext uri="{FF2B5EF4-FFF2-40B4-BE49-F238E27FC236}">
+                <a16:creationId xmlns:a16="http://schemas.microsoft.com/office/drawing/2014/main" id="{41182EB7-0131-4109-95DD-2B334CE3270A}"/>
+              </a:ext>
+            </a:extLst>
+          </p:cNvPr>
+          <p:cNvSpPr>
+            <a:spLocks noGrp="1"/>
+          </p:cNvSpPr>
+          <p:nvPr>
+            <p:ph type="body" idx="1"/>
+          </p:nvPr>
+        </p:nvSpPr>
+        <p:spPr/>
+        <p:txBody>
+          <a:bodyPr/>
+          <a:lstStyle/>
+          <a:p>
+            <a:r>
+              <a:rPr lang="ru-RU" dirty="0"/>
+              <a:t>Доказательства, </a:t>
+            </a:r>
+            <a:r>
+              <a:rPr lang="en-US" dirty="0"/>
+              <a:t>NP-</a:t>
+            </a:r>
+            <a:r>
+              <a:rPr lang="ru-RU" dirty="0"/>
+              <a:t>трудность и </a:t>
+            </a:r>
+            <a:r>
+              <a:rPr lang="en-US" dirty="0"/>
+              <a:t>NP-</a:t>
+            </a:r>
+            <a:r>
+              <a:rPr lang="ru-RU" dirty="0"/>
+              <a:t>полнота.</a:t>
+            </a:r>
+            <a:r>
+              <a:rPr lang="en-US" dirty="0"/>
+              <a:t> </a:t>
+            </a:r>
+            <a:endParaRPr lang="ru-RU" dirty="0"/>
+          </a:p>
+        </p:txBody>
+      </p:sp>
+    </p:spTree>
+    <p:extLst>
+      <p:ext uri="{BB962C8B-B14F-4D97-AF65-F5344CB8AC3E}">
+        <p14:creationId xmlns:p14="http://schemas.microsoft.com/office/powerpoint/2010/main" val="1478404042"/>
+      </p:ext>
+    </p:extLst>
+  </p:cSld>
+  <p:clrMapOvr>
+    <a:masterClrMapping/>
+  </p:clrMapOvr>
+</p:sld>
+</file>
+
+<file path=ppt/slides/slide13.xml><?xml version="1.0" encoding="utf-8"?>
 <p:sld xmlns:a="http://schemas.openxmlformats.org/drawingml/2006/main" xmlns:r="http://schemas.openxmlformats.org/officeDocument/2006/relationships" xmlns:p="http://schemas.openxmlformats.org/presentationml/2006/main">
   <p:cSld>
     <p:spTree>
@@ -3639,7 +4035,7 @@
 </p:sld>
 </file>
 
-<file path=ppt/slides/slide11.xml><?xml version="1.0" encoding="utf-8"?>
+<file path=ppt/slides/slide14.xml><?xml version="1.0" encoding="utf-8"?>
 <p:sld xmlns:a="http://schemas.openxmlformats.org/drawingml/2006/main" xmlns:r="http://schemas.openxmlformats.org/officeDocument/2006/relationships" xmlns:p="http://schemas.openxmlformats.org/presentationml/2006/main">
   <p:cSld>
     <p:spTree>
@@ -3732,7 +4128,7 @@
 </p:sld>
 </file>
 
-<file path=ppt/slides/slide12.xml><?xml version="1.0" encoding="utf-8"?>
+<file path=ppt/slides/slide15.xml><?xml version="1.0" encoding="utf-8"?>
 <p:sld xmlns:a="http://schemas.openxmlformats.org/drawingml/2006/main" xmlns:r="http://schemas.openxmlformats.org/officeDocument/2006/relationships" xmlns:p="http://schemas.openxmlformats.org/presentationml/2006/main">
   <p:cSld>
     <p:spTree>
@@ -3824,7 +4220,7 @@
 </p:sld>
 </file>
 
-<file path=ppt/slides/slide13.xml><?xml version="1.0" encoding="utf-8"?>
+<file path=ppt/slides/slide16.xml><?xml version="1.0" encoding="utf-8"?>
 <p:sld xmlns:a="http://schemas.openxmlformats.org/drawingml/2006/main" xmlns:r="http://schemas.openxmlformats.org/officeDocument/2006/relationships" xmlns:p="http://schemas.openxmlformats.org/presentationml/2006/main">
   <p:cSld>
     <p:spTree>
@@ -3869,8 +4265,8 @@
           </a:p>
         </p:txBody>
       </p:sp>
-      <mc:AlternateContent xmlns:mc="http://schemas.openxmlformats.org/markup-compatibility/2006">
-        <mc:Choice xmlns:a14="http://schemas.microsoft.com/office/drawing/2010/main" Requires="a14">
+      <mc:AlternateContent xmlns:mc="http://schemas.openxmlformats.org/markup-compatibility/2006" xmlns:a14="http://schemas.microsoft.com/office/drawing/2010/main">
+        <mc:Choice Requires="a14">
           <p:sp>
             <p:nvSpPr>
               <p:cNvPr id="15" name="Текст 14">
@@ -3982,7 +4378,7 @@
             </p:txBody>
           </p:sp>
         </mc:Choice>
-        <mc:Fallback>
+        <mc:Fallback xmlns="">
           <p:sp>
             <p:nvSpPr>
               <p:cNvPr id="15" name="Текст 14">
@@ -4073,7 +4469,7 @@
 </p:sld>
 </file>
 
-<file path=ppt/slides/slide14.xml><?xml version="1.0" encoding="utf-8"?>
+<file path=ppt/slides/slide17.xml><?xml version="1.0" encoding="utf-8"?>
 <p:sld xmlns:a="http://schemas.openxmlformats.org/drawingml/2006/main" xmlns:r="http://schemas.openxmlformats.org/officeDocument/2006/relationships" xmlns:p="http://schemas.openxmlformats.org/presentationml/2006/main">
   <p:cSld>
     <p:spTree>
@@ -4166,7 +4562,7 @@
 </p:sld>
 </file>
 
-<file path=ppt/slides/slide15.xml><?xml version="1.0" encoding="utf-8"?>
+<file path=ppt/slides/slide18.xml><?xml version="1.0" encoding="utf-8"?>
 <p:sld xmlns:a="http://schemas.openxmlformats.org/drawingml/2006/main" xmlns:r="http://schemas.openxmlformats.org/officeDocument/2006/relationships" xmlns:p="http://schemas.openxmlformats.org/presentationml/2006/main">
   <p:cSld>
     <p:spTree>
@@ -4259,7 +4655,7 @@
 </p:sld>
 </file>
 
-<file path=ppt/slides/slide16.xml><?xml version="1.0" encoding="utf-8"?>
+<file path=ppt/slides/slide19.xml><?xml version="1.0" encoding="utf-8"?>
 <p:sld xmlns:a="http://schemas.openxmlformats.org/drawingml/2006/main" xmlns:r="http://schemas.openxmlformats.org/officeDocument/2006/relationships" xmlns:p="http://schemas.openxmlformats.org/presentationml/2006/main">
   <p:cSld>
     <p:spTree>
@@ -4350,7 +4746,7 @@
 </p:sld>
 </file>
 
-<file path=ppt/slides/slide17.xml><?xml version="1.0" encoding="utf-8"?>
+<file path=ppt/slides/slide2.xml><?xml version="1.0" encoding="utf-8"?>
 <p:sld xmlns:a="http://schemas.openxmlformats.org/drawingml/2006/main" xmlns:r="http://schemas.openxmlformats.org/officeDocument/2006/relationships" xmlns:p="http://schemas.openxmlformats.org/presentationml/2006/main">
   <p:cSld>
     <p:spTree>
@@ -4372,6 +4768,92 @@
           <p:cNvPr id="2" name="Заголовок 1">
             <a:extLst>
               <a:ext uri="{FF2B5EF4-FFF2-40B4-BE49-F238E27FC236}">
+                <a16:creationId xmlns:a16="http://schemas.microsoft.com/office/drawing/2014/main" id="{55E23139-BDEE-F4FF-FA2D-E225B9D24E45}"/>
+              </a:ext>
+            </a:extLst>
+          </p:cNvPr>
+          <p:cNvSpPr>
+            <a:spLocks noGrp="1"/>
+          </p:cNvSpPr>
+          <p:nvPr>
+            <p:ph type="title"/>
+          </p:nvPr>
+        </p:nvSpPr>
+        <p:spPr/>
+        <p:txBody>
+          <a:bodyPr/>
+          <a:lstStyle/>
+          <a:p>
+            <a:r>
+              <a:rPr lang="ru-RU" dirty="0"/>
+              <a:t>Цель</a:t>
+            </a:r>
+          </a:p>
+        </p:txBody>
+      </p:sp>
+      <p:sp>
+        <p:nvSpPr>
+          <p:cNvPr id="3" name="Текст 2">
+            <a:extLst>
+              <a:ext uri="{FF2B5EF4-FFF2-40B4-BE49-F238E27FC236}">
+                <a16:creationId xmlns:a16="http://schemas.microsoft.com/office/drawing/2014/main" id="{A1FAC4FF-0189-8E25-81A5-2F65EA95F7E2}"/>
+              </a:ext>
+            </a:extLst>
+          </p:cNvPr>
+          <p:cNvSpPr>
+            <a:spLocks noGrp="1"/>
+          </p:cNvSpPr>
+          <p:nvPr>
+            <p:ph type="body" idx="1"/>
+          </p:nvPr>
+        </p:nvSpPr>
+        <p:spPr/>
+        <p:txBody>
+          <a:bodyPr/>
+          <a:lstStyle/>
+          <a:p>
+            <a:r>
+              <a:rPr lang="ru-RU" dirty="0"/>
+              <a:t>Разработка и применение собственного алгоритма (громкое заявление) для решения задачи поиска минимального количества охранников. </a:t>
+            </a:r>
+          </a:p>
+        </p:txBody>
+      </p:sp>
+    </p:spTree>
+    <p:extLst>
+      <p:ext uri="{BB962C8B-B14F-4D97-AF65-F5344CB8AC3E}">
+        <p14:creationId xmlns:p14="http://schemas.microsoft.com/office/powerpoint/2010/main" val="4105617275"/>
+      </p:ext>
+    </p:extLst>
+  </p:cSld>
+  <p:clrMapOvr>
+    <a:masterClrMapping/>
+  </p:clrMapOvr>
+</p:sld>
+</file>
+
+<file path=ppt/slides/slide20.xml><?xml version="1.0" encoding="utf-8"?>
+<p:sld xmlns:a="http://schemas.openxmlformats.org/drawingml/2006/main" xmlns:r="http://schemas.openxmlformats.org/officeDocument/2006/relationships" xmlns:p="http://schemas.openxmlformats.org/presentationml/2006/main">
+  <p:cSld>
+    <p:spTree>
+      <p:nvGrpSpPr>
+        <p:cNvPr id="1" name=""/>
+        <p:cNvGrpSpPr/>
+        <p:nvPr/>
+      </p:nvGrpSpPr>
+      <p:grpSpPr>
+        <a:xfrm>
+          <a:off x="0" y="0"/>
+          <a:ext cx="0" cy="0"/>
+          <a:chOff x="0" y="0"/>
+          <a:chExt cx="0" cy="0"/>
+        </a:xfrm>
+      </p:grpSpPr>
+      <p:sp>
+        <p:nvSpPr>
+          <p:cNvPr id="2" name="Заголовок 1">
+            <a:extLst>
+              <a:ext uri="{FF2B5EF4-FFF2-40B4-BE49-F238E27FC236}">
                 <a16:creationId xmlns:a16="http://schemas.microsoft.com/office/drawing/2014/main" id="{12A33F6D-7D49-58CE-C2CF-A910880942F0}"/>
               </a:ext>
             </a:extLst>
@@ -4395,8 +4877,8 @@
           </a:p>
         </p:txBody>
       </p:sp>
-      <mc:AlternateContent xmlns:mc="http://schemas.openxmlformats.org/markup-compatibility/2006">
-        <mc:Choice xmlns:a14="http://schemas.microsoft.com/office/drawing/2010/main" Requires="a14">
+      <mc:AlternateContent xmlns:mc="http://schemas.openxmlformats.org/markup-compatibility/2006" xmlns:a14="http://schemas.microsoft.com/office/drawing/2010/main">
+        <mc:Choice Requires="a14">
           <p:sp>
             <p:nvSpPr>
               <p:cNvPr id="3" name="Текст 2">
@@ -4476,7 +4958,7 @@
             </p:txBody>
           </p:sp>
         </mc:Choice>
-        <mc:Fallback>
+        <mc:Fallback xmlns="">
           <p:sp>
             <p:nvSpPr>
               <p:cNvPr id="3" name="Текст 2">
@@ -4529,7 +5011,7 @@
 </p:sld>
 </file>
 
-<file path=ppt/slides/slide18.xml><?xml version="1.0" encoding="utf-8"?>
+<file path=ppt/slides/slide21.xml><?xml version="1.0" encoding="utf-8"?>
 <p:sld xmlns:a="http://schemas.openxmlformats.org/drawingml/2006/main" xmlns:r="http://schemas.openxmlformats.org/officeDocument/2006/relationships" xmlns:p="http://schemas.openxmlformats.org/presentationml/2006/main">
   <p:cSld>
     <p:spTree>
@@ -4633,7 +5115,7 @@
 </p:sld>
 </file>
 
-<file path=ppt/slides/slide19.xml><?xml version="1.0" encoding="utf-8"?>
+<file path=ppt/slides/slide22.xml><?xml version="1.0" encoding="utf-8"?>
 <p:sld xmlns:a="http://schemas.openxmlformats.org/drawingml/2006/main" xmlns:r="http://schemas.openxmlformats.org/officeDocument/2006/relationships" xmlns:p="http://schemas.openxmlformats.org/presentationml/2006/main">
   <p:cSld>
     <p:spTree>
@@ -4742,7 +5224,7 @@
 </p:sld>
 </file>
 
-<file path=ppt/slides/slide2.xml><?xml version="1.0" encoding="utf-8"?>
+<file path=ppt/slides/slide23.xml><?xml version="1.0" encoding="utf-8"?>
 <p:sld xmlns:a="http://schemas.openxmlformats.org/drawingml/2006/main" xmlns:r="http://schemas.openxmlformats.org/officeDocument/2006/relationships" xmlns:p="http://schemas.openxmlformats.org/presentationml/2006/main">
   <p:cSld>
     <p:spTree>
@@ -4764,95 +5246,6 @@
           <p:cNvPr id="2" name="Заголовок 1">
             <a:extLst>
               <a:ext uri="{FF2B5EF4-FFF2-40B4-BE49-F238E27FC236}">
-                <a16:creationId xmlns:a16="http://schemas.microsoft.com/office/drawing/2014/main" id="{063DABDE-1979-0E88-26E9-520CE9939154}"/>
-              </a:ext>
-            </a:extLst>
-          </p:cNvPr>
-          <p:cNvSpPr>
-            <a:spLocks noGrp="1"/>
-          </p:cNvSpPr>
-          <p:nvPr>
-            <p:ph type="title"/>
-          </p:nvPr>
-        </p:nvSpPr>
-        <p:spPr/>
-        <p:txBody>
-          <a:bodyPr/>
-          <a:lstStyle/>
-          <a:p>
-            <a:r>
-              <a:rPr lang="ru-RU" dirty="0"/>
-              <a:t>Формулировка задачи</a:t>
-            </a:r>
-          </a:p>
-        </p:txBody>
-      </p:sp>
-      <p:sp>
-        <p:nvSpPr>
-          <p:cNvPr id="3" name="Объект 2">
-            <a:extLst>
-              <a:ext uri="{FF2B5EF4-FFF2-40B4-BE49-F238E27FC236}">
-                <a16:creationId xmlns:a16="http://schemas.microsoft.com/office/drawing/2014/main" id="{1B931CA5-7026-0B76-A8C7-C1EDB1DE4BF5}"/>
-              </a:ext>
-            </a:extLst>
-          </p:cNvPr>
-          <p:cNvSpPr>
-            <a:spLocks noGrp="1"/>
-          </p:cNvSpPr>
-          <p:nvPr>
-            <p:ph idx="1"/>
-          </p:nvPr>
-        </p:nvSpPr>
-        <p:spPr/>
-        <p:txBody>
-          <a:bodyPr/>
-          <a:lstStyle/>
-          <a:p>
-            <a:pPr marL="0" indent="0">
-              <a:buNone/>
-            </a:pPr>
-            <a:r>
-              <a:rPr lang="ru-RU" dirty="0"/>
-              <a:t>Директор музея хочет, чтобы каждая точка музея постоянно наблюдалась охранником. Охранники располагаются в стационарных пунктах, но могут поворачиваться. Сколько охранников необходимо?</a:t>
-            </a:r>
-          </a:p>
-        </p:txBody>
-      </p:sp>
-    </p:spTree>
-    <p:extLst>
-      <p:ext uri="{BB962C8B-B14F-4D97-AF65-F5344CB8AC3E}">
-        <p14:creationId xmlns:p14="http://schemas.microsoft.com/office/powerpoint/2010/main" val="3126516693"/>
-      </p:ext>
-    </p:extLst>
-  </p:cSld>
-  <p:clrMapOvr>
-    <a:masterClrMapping/>
-  </p:clrMapOvr>
-</p:sld>
-</file>
-
-<file path=ppt/slides/slide20.xml><?xml version="1.0" encoding="utf-8"?>
-<p:sld xmlns:a="http://schemas.openxmlformats.org/drawingml/2006/main" xmlns:r="http://schemas.openxmlformats.org/officeDocument/2006/relationships" xmlns:p="http://schemas.openxmlformats.org/presentationml/2006/main">
-  <p:cSld>
-    <p:spTree>
-      <p:nvGrpSpPr>
-        <p:cNvPr id="1" name=""/>
-        <p:cNvGrpSpPr/>
-        <p:nvPr/>
-      </p:nvGrpSpPr>
-      <p:grpSpPr>
-        <a:xfrm>
-          <a:off x="0" y="0"/>
-          <a:ext cx="0" cy="0"/>
-          <a:chOff x="0" y="0"/>
-          <a:chExt cx="0" cy="0"/>
-        </a:xfrm>
-      </p:grpSpPr>
-      <p:sp>
-        <p:nvSpPr>
-          <p:cNvPr id="2" name="Заголовок 1">
-            <a:extLst>
-              <a:ext uri="{FF2B5EF4-FFF2-40B4-BE49-F238E27FC236}">
                 <a16:creationId xmlns:a16="http://schemas.microsoft.com/office/drawing/2014/main" id="{2D65FF69-21BB-AE65-BB3E-F39E9198393F}"/>
               </a:ext>
             </a:extLst>
@@ -4899,13 +5292,7 @@
           <a:p>
             <a:r>
               <a:rPr lang="ru-RU" dirty="0"/>
-              <a:t>Алгоритм, возвращающий неоптимальные решения для задачи</a:t>
-            </a:r>
-          </a:p>
-          <a:p>
-            <a:r>
-              <a:rPr lang="ru-RU" dirty="0"/>
-              <a:t>оптимизации, называется алгоритмом аппроксимации.</a:t>
+              <a:t>Алгоритм, возвращающий неоптимальные решения для задачи оптимизации, называется алгоритмом аппроксимации.</a:t>
             </a:r>
           </a:p>
           <a:p>
@@ -4926,7 +5313,7 @@
 </p:sld>
 </file>
 
-<file path=ppt/slides/slide21.xml><?xml version="1.0" encoding="utf-8"?>
+<file path=ppt/slides/slide24.xml><?xml version="1.0" encoding="utf-8"?>
 <p:sld xmlns:a="http://schemas.openxmlformats.org/drawingml/2006/main" xmlns:r="http://schemas.openxmlformats.org/officeDocument/2006/relationships" xmlns:p="http://schemas.openxmlformats.org/presentationml/2006/main">
   <p:cSld>
     <p:spTree>
@@ -6743,8 +7130,8 @@
 </p:sld>
 </file>
 
-<file path=ppt/slides/slide22.xml><?xml version="1.0" encoding="utf-8"?>
-<p:sld xmlns:a="http://schemas.openxmlformats.org/drawingml/2006/main" xmlns:r="http://schemas.openxmlformats.org/officeDocument/2006/relationships" xmlns:p="http://schemas.openxmlformats.org/presentationml/2006/main">
+<file path=ppt/slides/slide25.xml><?xml version="1.0" encoding="utf-8"?>
+<p:sld xmlns:a="http://schemas.openxmlformats.org/drawingml/2006/main" xmlns:r="http://schemas.openxmlformats.org/officeDocument/2006/relationships" xmlns:p="http://schemas.openxmlformats.org/presentationml/2006/main" show="0">
   <p:cSld>
     <p:spTree>
       <p:nvGrpSpPr>
@@ -6801,7 +7188,7 @@
 </p:sld>
 </file>
 
-<file path=ppt/slides/slide23.xml><?xml version="1.0" encoding="utf-8"?>
+<file path=ppt/slides/slide26.xml><?xml version="1.0" encoding="utf-8"?>
 <p:sld xmlns:a="http://schemas.openxmlformats.org/drawingml/2006/main" xmlns:r="http://schemas.openxmlformats.org/officeDocument/2006/relationships" xmlns:p="http://schemas.openxmlformats.org/presentationml/2006/main">
   <p:cSld>
     <p:spTree>
@@ -6895,8 +7282,8 @@
 </p:sld>
 </file>
 
-<file path=ppt/slides/slide24.xml><?xml version="1.0" encoding="utf-8"?>
-<p:sld xmlns:a="http://schemas.openxmlformats.org/drawingml/2006/main" xmlns:r="http://schemas.openxmlformats.org/officeDocument/2006/relationships" xmlns:p="http://schemas.openxmlformats.org/presentationml/2006/main">
+<file path=ppt/slides/slide27.xml><?xml version="1.0" encoding="utf-8"?>
+<p:sld xmlns:a="http://schemas.openxmlformats.org/drawingml/2006/main" xmlns:r="http://schemas.openxmlformats.org/officeDocument/2006/relationships" xmlns:p="http://schemas.openxmlformats.org/presentationml/2006/main" show="0">
   <p:cSld>
     <p:spTree>
       <p:nvGrpSpPr>
@@ -6953,7 +7340,7 @@
 </p:sld>
 </file>
 
-<file path=ppt/slides/slide25.xml><?xml version="1.0" encoding="utf-8"?>
+<file path=ppt/slides/slide28.xml><?xml version="1.0" encoding="utf-8"?>
 <p:sld xmlns:a="http://schemas.openxmlformats.org/drawingml/2006/main" xmlns:r="http://schemas.openxmlformats.org/officeDocument/2006/relationships" xmlns:p="http://schemas.openxmlformats.org/presentationml/2006/main">
   <p:cSld>
     <p:spTree>
@@ -7046,7 +7433,7 @@
 </p:sld>
 </file>
 
-<file path=ppt/slides/slide26.xml><?xml version="1.0" encoding="utf-8"?>
+<file path=ppt/slides/slide29.xml><?xml version="1.0" encoding="utf-8"?>
 <p:sld xmlns:a="http://schemas.openxmlformats.org/drawingml/2006/main" xmlns:r="http://schemas.openxmlformats.org/officeDocument/2006/relationships" xmlns:p="http://schemas.openxmlformats.org/presentationml/2006/main">
   <p:cSld>
     <p:spTree>
@@ -7132,7 +7519,7 @@
 </p:sld>
 </file>
 
-<file path=ppt/slides/slide27.xml><?xml version="1.0" encoding="utf-8"?>
+<file path=ppt/slides/slide3.xml><?xml version="1.0" encoding="utf-8"?>
 <p:sld xmlns:a="http://schemas.openxmlformats.org/drawingml/2006/main" xmlns:r="http://schemas.openxmlformats.org/officeDocument/2006/relationships" xmlns:p="http://schemas.openxmlformats.org/presentationml/2006/main">
   <p:cSld>
     <p:spTree>
@@ -7154,6 +7541,147 @@
           <p:cNvPr id="2" name="Заголовок 1">
             <a:extLst>
               <a:ext uri="{FF2B5EF4-FFF2-40B4-BE49-F238E27FC236}">
+                <a16:creationId xmlns:a16="http://schemas.microsoft.com/office/drawing/2014/main" id="{54191649-35E0-4BD9-D93F-F594B857F424}"/>
+              </a:ext>
+            </a:extLst>
+          </p:cNvPr>
+          <p:cNvSpPr>
+            <a:spLocks noGrp="1"/>
+          </p:cNvSpPr>
+          <p:nvPr>
+            <p:ph type="title"/>
+          </p:nvPr>
+        </p:nvSpPr>
+        <p:spPr/>
+        <p:txBody>
+          <a:bodyPr/>
+          <a:lstStyle/>
+          <a:p>
+            <a:r>
+              <a:rPr lang="ru-RU" dirty="0"/>
+              <a:t>Задачи</a:t>
+            </a:r>
+          </a:p>
+        </p:txBody>
+      </p:sp>
+      <p:sp>
+        <p:nvSpPr>
+          <p:cNvPr id="3" name="Объект 2">
+            <a:extLst>
+              <a:ext uri="{FF2B5EF4-FFF2-40B4-BE49-F238E27FC236}">
+                <a16:creationId xmlns:a16="http://schemas.microsoft.com/office/drawing/2014/main" id="{A12E1678-DE54-C589-8605-47B84DF817D6}"/>
+              </a:ext>
+            </a:extLst>
+          </p:cNvPr>
+          <p:cNvSpPr>
+            <a:spLocks noGrp="1"/>
+          </p:cNvSpPr>
+          <p:nvPr>
+            <p:ph idx="1"/>
+          </p:nvPr>
+        </p:nvSpPr>
+        <p:spPr>
+          <a:xfrm>
+            <a:off x="838200" y="1605585"/>
+            <a:ext cx="10306878" cy="5032375"/>
+          </a:xfrm>
+        </p:spPr>
+        <p:txBody>
+          <a:bodyPr>
+            <a:normAutofit fontScale="92500" lnSpcReduction="10000"/>
+          </a:bodyPr>
+          <a:lstStyle/>
+          <a:p>
+            <a:pPr marL="514350" indent="-514350">
+              <a:buAutoNum type="arabicPeriod"/>
+            </a:pPr>
+            <a:r>
+              <a:rPr lang="ru-RU" dirty="0"/>
+              <a:t>Провести обзор существующих алгоритмов, направленных на решение задачи охраны музейной галереи, и выявить наиболее эффективные из них. </a:t>
+            </a:r>
+          </a:p>
+          <a:p>
+            <a:pPr marL="514350" indent="-514350">
+              <a:buAutoNum type="arabicPeriod"/>
+            </a:pPr>
+            <a:r>
+              <a:rPr lang="ru-RU" dirty="0"/>
+              <a:t>Скорректировать выбранный алгоритм и обосновать их эффективность.</a:t>
+            </a:r>
+          </a:p>
+          <a:p>
+            <a:pPr marL="514350" indent="-514350">
+              <a:buAutoNum type="arabicPeriod"/>
+            </a:pPr>
+            <a:r>
+              <a:rPr lang="ru-RU" dirty="0"/>
+              <a:t>Разработать программную реализацию модификации существующего алгоритма.</a:t>
+            </a:r>
+          </a:p>
+          <a:p>
+            <a:pPr marL="514350" indent="-514350">
+              <a:buAutoNum type="arabicPeriod"/>
+            </a:pPr>
+            <a:r>
+              <a:rPr lang="ru-RU" dirty="0"/>
+              <a:t>Провести тестирование алгоритма в рамках абстрактной модели.</a:t>
+            </a:r>
+          </a:p>
+          <a:p>
+            <a:pPr marL="514350" indent="-514350">
+              <a:buAutoNum type="arabicPeriod"/>
+            </a:pPr>
+            <a:r>
+              <a:rPr lang="ru-RU" dirty="0"/>
+              <a:t>Адаптировать программу к реальной модели и провести дополнительные тесты.</a:t>
+            </a:r>
+          </a:p>
+          <a:p>
+            <a:pPr marL="514350" indent="-514350">
+              <a:buAutoNum type="arabicPeriod"/>
+            </a:pPr>
+            <a:r>
+              <a:rPr lang="ru-RU" dirty="0"/>
+              <a:t>Разработать графический интерфейс для удобства использования программы.</a:t>
+            </a:r>
+          </a:p>
+        </p:txBody>
+      </p:sp>
+    </p:spTree>
+    <p:extLst>
+      <p:ext uri="{BB962C8B-B14F-4D97-AF65-F5344CB8AC3E}">
+        <p14:creationId xmlns:p14="http://schemas.microsoft.com/office/powerpoint/2010/main" val="1500807953"/>
+      </p:ext>
+    </p:extLst>
+  </p:cSld>
+  <p:clrMapOvr>
+    <a:masterClrMapping/>
+  </p:clrMapOvr>
+</p:sld>
+</file>
+
+<file path=ppt/slides/slide30.xml><?xml version="1.0" encoding="utf-8"?>
+<p:sld xmlns:a="http://schemas.openxmlformats.org/drawingml/2006/main" xmlns:r="http://schemas.openxmlformats.org/officeDocument/2006/relationships" xmlns:p="http://schemas.openxmlformats.org/presentationml/2006/main">
+  <p:cSld>
+    <p:spTree>
+      <p:nvGrpSpPr>
+        <p:cNvPr id="1" name=""/>
+        <p:cNvGrpSpPr/>
+        <p:nvPr/>
+      </p:nvGrpSpPr>
+      <p:grpSpPr>
+        <a:xfrm>
+          <a:off x="0" y="0"/>
+          <a:ext cx="0" cy="0"/>
+          <a:chOff x="0" y="0"/>
+          <a:chExt cx="0" cy="0"/>
+        </a:xfrm>
+      </p:grpSpPr>
+      <p:sp>
+        <p:nvSpPr>
+          <p:cNvPr id="2" name="Заголовок 1">
+            <a:extLst>
+              <a:ext uri="{FF2B5EF4-FFF2-40B4-BE49-F238E27FC236}">
                 <a16:creationId xmlns:a16="http://schemas.microsoft.com/office/drawing/2014/main" id="{26D51D08-4E36-3C59-C285-A89819162EA3}"/>
               </a:ext>
             </a:extLst>
@@ -7177,8 +7705,8 @@
           </a:p>
         </p:txBody>
       </p:sp>
-      <mc:AlternateContent xmlns:mc="http://schemas.openxmlformats.org/markup-compatibility/2006">
-        <mc:Choice xmlns:a14="http://schemas.microsoft.com/office/drawing/2010/main" Requires="a14">
+      <mc:AlternateContent xmlns:mc="http://schemas.openxmlformats.org/markup-compatibility/2006" xmlns:a14="http://schemas.microsoft.com/office/drawing/2010/main">
+        <mc:Choice Requires="a14">
           <p:sp>
             <p:nvSpPr>
               <p:cNvPr id="10" name="TextBox 9">
@@ -7331,7 +7859,7 @@
             </p:txBody>
           </p:sp>
         </mc:Choice>
-        <mc:Fallback>
+        <mc:Fallback xmlns="">
           <p:sp>
             <p:nvSpPr>
               <p:cNvPr id="10" name="TextBox 9">
@@ -7414,7 +7942,7 @@
 </p:sld>
 </file>
 
-<file path=ppt/slides/slide28.xml><?xml version="1.0" encoding="utf-8"?>
+<file path=ppt/slides/slide31.xml><?xml version="1.0" encoding="utf-8"?>
 <p:sld xmlns:a="http://schemas.openxmlformats.org/drawingml/2006/main" xmlns:r="http://schemas.openxmlformats.org/officeDocument/2006/relationships" xmlns:p="http://schemas.openxmlformats.org/presentationml/2006/main">
   <p:cSld>
     <p:spTree>
@@ -8633,7 +9161,7 @@
 </p:sld>
 </file>
 
-<file path=ppt/slides/slide3.xml><?xml version="1.0" encoding="utf-8"?>
+<file path=ppt/slides/slide4.xml><?xml version="1.0" encoding="utf-8"?>
 <p:sld xmlns:a="http://schemas.openxmlformats.org/drawingml/2006/main" xmlns:r="http://schemas.openxmlformats.org/officeDocument/2006/relationships" xmlns:p="http://schemas.openxmlformats.org/presentationml/2006/main">
   <p:cSld>
     <p:spTree>
@@ -8655,6 +9183,181 @@
           <p:cNvPr id="2" name="Заголовок 1">
             <a:extLst>
               <a:ext uri="{FF2B5EF4-FFF2-40B4-BE49-F238E27FC236}">
+                <a16:creationId xmlns:a16="http://schemas.microsoft.com/office/drawing/2014/main" id="{55E23139-BDEE-F4FF-FA2D-E225B9D24E45}"/>
+              </a:ext>
+            </a:extLst>
+          </p:cNvPr>
+          <p:cNvSpPr>
+            <a:spLocks noGrp="1"/>
+          </p:cNvSpPr>
+          <p:nvPr>
+            <p:ph type="title"/>
+          </p:nvPr>
+        </p:nvSpPr>
+        <p:spPr/>
+        <p:txBody>
+          <a:bodyPr/>
+          <a:lstStyle/>
+          <a:p>
+            <a:r>
+              <a:rPr lang="ru-RU" dirty="0"/>
+              <a:t>Цель</a:t>
+            </a:r>
+          </a:p>
+        </p:txBody>
+      </p:sp>
+      <p:sp>
+        <p:nvSpPr>
+          <p:cNvPr id="3" name="Текст 2">
+            <a:extLst>
+              <a:ext uri="{FF2B5EF4-FFF2-40B4-BE49-F238E27FC236}">
+                <a16:creationId xmlns:a16="http://schemas.microsoft.com/office/drawing/2014/main" id="{A1FAC4FF-0189-8E25-81A5-2F65EA95F7E2}"/>
+              </a:ext>
+            </a:extLst>
+          </p:cNvPr>
+          <p:cNvSpPr>
+            <a:spLocks noGrp="1"/>
+          </p:cNvSpPr>
+          <p:nvPr>
+            <p:ph type="body" idx="1"/>
+          </p:nvPr>
+        </p:nvSpPr>
+        <p:spPr/>
+        <p:txBody>
+          <a:bodyPr/>
+          <a:lstStyle/>
+          <a:p>
+            <a:r>
+              <a:rPr lang="ru-RU" dirty="0"/>
+              <a:t>Разработка и применение собственного алгоритма (громкое заявление) для решения задачи поиска минимального количества охранников. </a:t>
+            </a:r>
+          </a:p>
+        </p:txBody>
+      </p:sp>
+    </p:spTree>
+    <p:extLst>
+      <p:ext uri="{BB962C8B-B14F-4D97-AF65-F5344CB8AC3E}">
+        <p14:creationId xmlns:p14="http://schemas.microsoft.com/office/powerpoint/2010/main" val="2874204259"/>
+      </p:ext>
+    </p:extLst>
+  </p:cSld>
+  <p:clrMapOvr>
+    <a:masterClrMapping/>
+  </p:clrMapOvr>
+</p:sld>
+</file>
+
+<file path=ppt/slides/slide5.xml><?xml version="1.0" encoding="utf-8"?>
+<p:sld xmlns:a="http://schemas.openxmlformats.org/drawingml/2006/main" xmlns:r="http://schemas.openxmlformats.org/officeDocument/2006/relationships" xmlns:p="http://schemas.openxmlformats.org/presentationml/2006/main">
+  <p:cSld>
+    <p:spTree>
+      <p:nvGrpSpPr>
+        <p:cNvPr id="1" name=""/>
+        <p:cNvGrpSpPr/>
+        <p:nvPr/>
+      </p:nvGrpSpPr>
+      <p:grpSpPr>
+        <a:xfrm>
+          <a:off x="0" y="0"/>
+          <a:ext cx="0" cy="0"/>
+          <a:chOff x="0" y="0"/>
+          <a:chExt cx="0" cy="0"/>
+        </a:xfrm>
+      </p:grpSpPr>
+      <p:sp>
+        <p:nvSpPr>
+          <p:cNvPr id="2" name="Заголовок 1">
+            <a:extLst>
+              <a:ext uri="{FF2B5EF4-FFF2-40B4-BE49-F238E27FC236}">
+                <a16:creationId xmlns:a16="http://schemas.microsoft.com/office/drawing/2014/main" id="{063DABDE-1979-0E88-26E9-520CE9939154}"/>
+              </a:ext>
+            </a:extLst>
+          </p:cNvPr>
+          <p:cNvSpPr>
+            <a:spLocks noGrp="1"/>
+          </p:cNvSpPr>
+          <p:nvPr>
+            <p:ph type="title"/>
+          </p:nvPr>
+        </p:nvSpPr>
+        <p:spPr/>
+        <p:txBody>
+          <a:bodyPr/>
+          <a:lstStyle/>
+          <a:p>
+            <a:r>
+              <a:rPr lang="ru-RU" dirty="0"/>
+              <a:t>Формулировка задачи</a:t>
+            </a:r>
+          </a:p>
+        </p:txBody>
+      </p:sp>
+      <p:sp>
+        <p:nvSpPr>
+          <p:cNvPr id="3" name="Объект 2">
+            <a:extLst>
+              <a:ext uri="{FF2B5EF4-FFF2-40B4-BE49-F238E27FC236}">
+                <a16:creationId xmlns:a16="http://schemas.microsoft.com/office/drawing/2014/main" id="{1B931CA5-7026-0B76-A8C7-C1EDB1DE4BF5}"/>
+              </a:ext>
+            </a:extLst>
+          </p:cNvPr>
+          <p:cNvSpPr>
+            <a:spLocks noGrp="1"/>
+          </p:cNvSpPr>
+          <p:nvPr>
+            <p:ph idx="1"/>
+          </p:nvPr>
+        </p:nvSpPr>
+        <p:spPr/>
+        <p:txBody>
+          <a:bodyPr/>
+          <a:lstStyle/>
+          <a:p>
+            <a:pPr marL="0" indent="0">
+              <a:buNone/>
+            </a:pPr>
+            <a:r>
+              <a:rPr lang="ru-RU" dirty="0"/>
+              <a:t>Директор музея хочет, чтобы каждая точка музея постоянно наблюдалась охранником. Охранники располагаются в стационарных пунктах, но могут поворачиваться. Сколько охранников необходимо?</a:t>
+            </a:r>
+          </a:p>
+        </p:txBody>
+      </p:sp>
+    </p:spTree>
+    <p:extLst>
+      <p:ext uri="{BB962C8B-B14F-4D97-AF65-F5344CB8AC3E}">
+        <p14:creationId xmlns:p14="http://schemas.microsoft.com/office/powerpoint/2010/main" val="3126516693"/>
+      </p:ext>
+    </p:extLst>
+  </p:cSld>
+  <p:clrMapOvr>
+    <a:masterClrMapping/>
+  </p:clrMapOvr>
+</p:sld>
+</file>
+
+<file path=ppt/slides/slide6.xml><?xml version="1.0" encoding="utf-8"?>
+<p:sld xmlns:a="http://schemas.openxmlformats.org/drawingml/2006/main" xmlns:r="http://schemas.openxmlformats.org/officeDocument/2006/relationships" xmlns:p="http://schemas.openxmlformats.org/presentationml/2006/main">
+  <p:cSld>
+    <p:spTree>
+      <p:nvGrpSpPr>
+        <p:cNvPr id="1" name=""/>
+        <p:cNvGrpSpPr/>
+        <p:nvPr/>
+      </p:nvGrpSpPr>
+      <p:grpSpPr>
+        <a:xfrm>
+          <a:off x="0" y="0"/>
+          <a:ext cx="0" cy="0"/>
+          <a:chOff x="0" y="0"/>
+          <a:chExt cx="0" cy="0"/>
+        </a:xfrm>
+      </p:grpSpPr>
+      <p:sp>
+        <p:nvSpPr>
+          <p:cNvPr id="2" name="Заголовок 1">
+            <a:extLst>
+              <a:ext uri="{FF2B5EF4-FFF2-40B4-BE49-F238E27FC236}">
                 <a16:creationId xmlns:a16="http://schemas.microsoft.com/office/drawing/2014/main" id="{54191649-35E0-4BD9-D93F-F594B857F424}"/>
               </a:ext>
             </a:extLst>
@@ -8749,7 +9452,7 @@
 </p:sld>
 </file>
 
-<file path=ppt/slides/slide4.xml><?xml version="1.0" encoding="utf-8"?>
+<file path=ppt/slides/slide7.xml><?xml version="1.0" encoding="utf-8"?>
 <p:sld xmlns:a="http://schemas.openxmlformats.org/drawingml/2006/main" xmlns:r="http://schemas.openxmlformats.org/officeDocument/2006/relationships" xmlns:p="http://schemas.openxmlformats.org/presentationml/2006/main">
   <p:cSld>
     <p:spTree>
@@ -8850,7 +9553,7 @@
 </p:sld>
 </file>
 
-<file path=ppt/slides/slide5.xml><?xml version="1.0" encoding="utf-8"?>
+<file path=ppt/slides/slide8.xml><?xml version="1.0" encoding="utf-8"?>
 <p:sld xmlns:a="http://schemas.openxmlformats.org/drawingml/2006/main" xmlns:r="http://schemas.openxmlformats.org/officeDocument/2006/relationships" xmlns:p="http://schemas.openxmlformats.org/presentationml/2006/main" show="0">
   <p:cSld>
     <p:spTree>
@@ -9196,353 +9899,6 @@
 </p:sld>
 </file>
 
-<file path=ppt/slides/slide6.xml><?xml version="1.0" encoding="utf-8"?>
-<p:sld xmlns:a="http://schemas.openxmlformats.org/drawingml/2006/main" xmlns:r="http://schemas.openxmlformats.org/officeDocument/2006/relationships" xmlns:p="http://schemas.openxmlformats.org/presentationml/2006/main">
-  <p:cSld>
-    <p:spTree>
-      <p:nvGrpSpPr>
-        <p:cNvPr id="1" name=""/>
-        <p:cNvGrpSpPr/>
-        <p:nvPr/>
-      </p:nvGrpSpPr>
-      <p:grpSpPr>
-        <a:xfrm>
-          <a:off x="0" y="0"/>
-          <a:ext cx="0" cy="0"/>
-          <a:chOff x="0" y="0"/>
-          <a:chExt cx="0" cy="0"/>
-        </a:xfrm>
-      </p:grpSpPr>
-      <p:sp>
-        <p:nvSpPr>
-          <p:cNvPr id="2" name="Заголовок 1">
-            <a:extLst>
-              <a:ext uri="{FF2B5EF4-FFF2-40B4-BE49-F238E27FC236}">
-                <a16:creationId xmlns:a16="http://schemas.microsoft.com/office/drawing/2014/main" id="{497EDA70-7D44-62BF-EFA2-4CCD15B3AD07}"/>
-              </a:ext>
-            </a:extLst>
-          </p:cNvPr>
-          <p:cNvSpPr>
-            <a:spLocks noGrp="1"/>
-          </p:cNvSpPr>
-          <p:nvPr>
-            <p:ph type="title"/>
-          </p:nvPr>
-        </p:nvSpPr>
-        <p:spPr/>
-        <p:txBody>
-          <a:bodyPr/>
-          <a:lstStyle/>
-          <a:p>
-            <a:r>
-              <a:rPr lang="ru-RU" dirty="0"/>
-              <a:t>Важно знать</a:t>
-            </a:r>
-          </a:p>
-        </p:txBody>
-      </p:sp>
-      <p:sp>
-        <p:nvSpPr>
-          <p:cNvPr id="3" name="Текст 2">
-            <a:extLst>
-              <a:ext uri="{FF2B5EF4-FFF2-40B4-BE49-F238E27FC236}">
-                <a16:creationId xmlns:a16="http://schemas.microsoft.com/office/drawing/2014/main" id="{D6F8E4FC-1230-68B8-31FA-82EFA829B055}"/>
-              </a:ext>
-            </a:extLst>
-          </p:cNvPr>
-          <p:cNvSpPr>
-            <a:spLocks noGrp="1"/>
-          </p:cNvSpPr>
-          <p:nvPr>
-            <p:ph type="body" idx="1"/>
-          </p:nvPr>
-        </p:nvSpPr>
-        <p:spPr/>
-        <p:txBody>
-          <a:bodyPr/>
-          <a:lstStyle/>
-          <a:p>
-            <a:r>
-              <a:rPr lang="ru-RU" dirty="0"/>
-              <a:t>Уточняющие моменты.</a:t>
-            </a:r>
-          </a:p>
-        </p:txBody>
-      </p:sp>
-    </p:spTree>
-    <p:extLst>
-      <p:ext uri="{BB962C8B-B14F-4D97-AF65-F5344CB8AC3E}">
-        <p14:creationId xmlns:p14="http://schemas.microsoft.com/office/powerpoint/2010/main" val="998850827"/>
-      </p:ext>
-    </p:extLst>
-  </p:cSld>
-  <p:clrMapOvr>
-    <a:masterClrMapping/>
-  </p:clrMapOvr>
-</p:sld>
-</file>
-
-<file path=ppt/slides/slide7.xml><?xml version="1.0" encoding="utf-8"?>
-<p:sld xmlns:a="http://schemas.openxmlformats.org/drawingml/2006/main" xmlns:r="http://schemas.openxmlformats.org/officeDocument/2006/relationships" xmlns:p="http://schemas.openxmlformats.org/presentationml/2006/main">
-  <p:cSld>
-    <p:spTree>
-      <p:nvGrpSpPr>
-        <p:cNvPr id="1" name=""/>
-        <p:cNvGrpSpPr/>
-        <p:nvPr/>
-      </p:nvGrpSpPr>
-      <p:grpSpPr>
-        <a:xfrm>
-          <a:off x="0" y="0"/>
-          <a:ext cx="0" cy="0"/>
-          <a:chOff x="0" y="0"/>
-          <a:chExt cx="0" cy="0"/>
-        </a:xfrm>
-      </p:grpSpPr>
-      <p:sp>
-        <p:nvSpPr>
-          <p:cNvPr id="2" name="Заголовок 1">
-            <a:extLst>
-              <a:ext uri="{FF2B5EF4-FFF2-40B4-BE49-F238E27FC236}">
-                <a16:creationId xmlns:a16="http://schemas.microsoft.com/office/drawing/2014/main" id="{26D51D08-4E36-3C59-C285-A89819162EA3}"/>
-              </a:ext>
-            </a:extLst>
-          </p:cNvPr>
-          <p:cNvSpPr>
-            <a:spLocks noGrp="1"/>
-          </p:cNvSpPr>
-          <p:nvPr>
-            <p:ph type="title"/>
-          </p:nvPr>
-        </p:nvSpPr>
-        <p:spPr/>
-        <p:txBody>
-          <a:bodyPr/>
-          <a:lstStyle/>
-          <a:p>
-            <a:r>
-              <a:rPr lang="ru-RU" dirty="0"/>
-              <a:t>Выпуклые многоугольники</a:t>
-            </a:r>
-          </a:p>
-        </p:txBody>
-      </p:sp>
-      <p:pic>
-        <p:nvPicPr>
-          <p:cNvPr id="5" name="Объект 4" descr="Изображение выглядит как диаграмма, линия, снимок экрана, дизайн&#10;&#10;Автоматически созданное описание">
-            <a:extLst>
-              <a:ext uri="{FF2B5EF4-FFF2-40B4-BE49-F238E27FC236}">
-                <a16:creationId xmlns:a16="http://schemas.microsoft.com/office/drawing/2014/main" id="{68ED7B39-277F-BE76-73A7-F2C29BF8099B}"/>
-              </a:ext>
-            </a:extLst>
-          </p:cNvPr>
-          <p:cNvPicPr>
-            <a:picLocks noGrp="1" noChangeAspect="1"/>
-          </p:cNvPicPr>
-          <p:nvPr>
-            <p:ph idx="1"/>
-          </p:nvPr>
-        </p:nvPicPr>
-        <p:blipFill>
-          <a:blip r:embed="rId2">
-            <a:extLst>
-              <a:ext uri="{28A0092B-C50C-407E-A947-70E740481C1C}">
-                <a14:useLocalDpi xmlns:a14="http://schemas.microsoft.com/office/drawing/2010/main" val="0"/>
-              </a:ext>
-            </a:extLst>
-          </a:blip>
-          <a:stretch>
-            <a:fillRect/>
-          </a:stretch>
-        </p:blipFill>
-        <p:spPr>
-          <a:xfrm>
-            <a:off x="5260498" y="1510054"/>
-            <a:ext cx="5449247" cy="3392812"/>
-          </a:xfrm>
-        </p:spPr>
-      </p:pic>
-      <p:pic>
-        <p:nvPicPr>
-          <p:cNvPr id="7" name="Рисунок 6" descr="Изображение выглядит как треугольник, линия&#10;&#10;Автоматически созданное описание">
-            <a:extLst>
-              <a:ext uri="{FF2B5EF4-FFF2-40B4-BE49-F238E27FC236}">
-                <a16:creationId xmlns:a16="http://schemas.microsoft.com/office/drawing/2014/main" id="{5C2287FC-D039-C102-88C4-24C7D5427978}"/>
-              </a:ext>
-            </a:extLst>
-          </p:cNvPr>
-          <p:cNvPicPr>
-            <a:picLocks noChangeAspect="1"/>
-          </p:cNvPicPr>
-          <p:nvPr/>
-        </p:nvPicPr>
-        <p:blipFill>
-          <a:blip r:embed="rId3">
-            <a:extLst>
-              <a:ext uri="{28A0092B-C50C-407E-A947-70E740481C1C}">
-                <a14:useLocalDpi xmlns:a14="http://schemas.microsoft.com/office/drawing/2010/main" val="0"/>
-              </a:ext>
-            </a:extLst>
-          </a:blip>
-          <a:stretch>
-            <a:fillRect/>
-          </a:stretch>
-        </p:blipFill>
-        <p:spPr>
-          <a:xfrm>
-            <a:off x="838200" y="1690688"/>
-            <a:ext cx="3564813" cy="3212178"/>
-          </a:xfrm>
-          <a:prstGeom prst="rect">
-            <a:avLst/>
-          </a:prstGeom>
-        </p:spPr>
-      </p:pic>
-      <p:sp>
-        <p:nvSpPr>
-          <p:cNvPr id="10" name="TextBox 9">
-            <a:extLst>
-              <a:ext uri="{FF2B5EF4-FFF2-40B4-BE49-F238E27FC236}">
-                <a16:creationId xmlns:a16="http://schemas.microsoft.com/office/drawing/2014/main" id="{36A6B241-AA3E-942F-EEDF-0E7B669FE535}"/>
-              </a:ext>
-            </a:extLst>
-          </p:cNvPr>
-          <p:cNvSpPr txBox="1"/>
-          <p:nvPr/>
-        </p:nvSpPr>
-        <p:spPr>
-          <a:xfrm>
-            <a:off x="1669815" y="5401464"/>
-            <a:ext cx="8852370" cy="646331"/>
-          </a:xfrm>
-          <a:prstGeom prst="rect">
-            <a:avLst/>
-          </a:prstGeom>
-          <a:noFill/>
-        </p:spPr>
-        <p:txBody>
-          <a:bodyPr wrap="square">
-            <a:spAutoFit/>
-          </a:bodyPr>
-          <a:lstStyle/>
-          <a:p>
-            <a:r>
-              <a:rPr lang="ru-RU" b="1" dirty="0"/>
-              <a:t>Лемма </a:t>
-            </a:r>
-            <a:r>
-              <a:rPr lang="ru-RU" dirty="0"/>
-              <a:t>- Каждый выпуклый компонент либо полностью виден, либо полностью не виден из вершины многоугольника.</a:t>
-            </a:r>
-          </a:p>
-        </p:txBody>
-      </p:sp>
-    </p:spTree>
-    <p:extLst>
-      <p:ext uri="{BB962C8B-B14F-4D97-AF65-F5344CB8AC3E}">
-        <p14:creationId xmlns:p14="http://schemas.microsoft.com/office/powerpoint/2010/main" val="462392401"/>
-      </p:ext>
-    </p:extLst>
-  </p:cSld>
-  <p:clrMapOvr>
-    <a:masterClrMapping/>
-  </p:clrMapOvr>
-</p:sld>
-</file>
-
-<file path=ppt/slides/slide8.xml><?xml version="1.0" encoding="utf-8"?>
-<p:sld xmlns:a="http://schemas.openxmlformats.org/drawingml/2006/main" xmlns:r="http://schemas.openxmlformats.org/officeDocument/2006/relationships" xmlns:p="http://schemas.openxmlformats.org/presentationml/2006/main">
-  <p:cSld>
-    <p:spTree>
-      <p:nvGrpSpPr>
-        <p:cNvPr id="1" name=""/>
-        <p:cNvGrpSpPr/>
-        <p:nvPr/>
-      </p:nvGrpSpPr>
-      <p:grpSpPr>
-        <a:xfrm>
-          <a:off x="0" y="0"/>
-          <a:ext cx="0" cy="0"/>
-          <a:chOff x="0" y="0"/>
-          <a:chExt cx="0" cy="0"/>
-        </a:xfrm>
-      </p:grpSpPr>
-      <p:sp>
-        <p:nvSpPr>
-          <p:cNvPr id="2" name="Заголовок 1">
-            <a:extLst>
-              <a:ext uri="{FF2B5EF4-FFF2-40B4-BE49-F238E27FC236}">
-                <a16:creationId xmlns:a16="http://schemas.microsoft.com/office/drawing/2014/main" id="{78CC4E43-432F-FF98-376F-55D04A47FC4A}"/>
-              </a:ext>
-            </a:extLst>
-          </p:cNvPr>
-          <p:cNvSpPr>
-            <a:spLocks noGrp="1"/>
-          </p:cNvSpPr>
-          <p:nvPr>
-            <p:ph type="title"/>
-          </p:nvPr>
-        </p:nvSpPr>
-        <p:spPr/>
-        <p:txBody>
-          <a:bodyPr/>
-          <a:lstStyle/>
-          <a:p>
-            <a:r>
-              <a:rPr lang="ru-RU" dirty="0"/>
-              <a:t>Многоугольник с покрытыми стенами</a:t>
-            </a:r>
-          </a:p>
-        </p:txBody>
-      </p:sp>
-      <p:pic>
-        <p:nvPicPr>
-          <p:cNvPr id="5" name="Объект 4" descr="Изображение выглядит как линия, диаграмма, Параллельный, График&#10;&#10;Автоматически созданное описание">
-            <a:extLst>
-              <a:ext uri="{FF2B5EF4-FFF2-40B4-BE49-F238E27FC236}">
-                <a16:creationId xmlns:a16="http://schemas.microsoft.com/office/drawing/2014/main" id="{7FBEAAA4-25BF-5F5A-A161-054399257F85}"/>
-              </a:ext>
-            </a:extLst>
-          </p:cNvPr>
-          <p:cNvPicPr>
-            <a:picLocks noGrp="1" noChangeAspect="1"/>
-          </p:cNvPicPr>
-          <p:nvPr>
-            <p:ph idx="1"/>
-          </p:nvPr>
-        </p:nvPicPr>
-        <p:blipFill>
-          <a:blip r:embed="rId2">
-            <a:extLst>
-              <a:ext uri="{28A0092B-C50C-407E-A947-70E740481C1C}">
-                <a14:useLocalDpi xmlns:a14="http://schemas.microsoft.com/office/drawing/2010/main" val="0"/>
-              </a:ext>
-            </a:extLst>
-          </a:blip>
-          <a:stretch>
-            <a:fillRect/>
-          </a:stretch>
-        </p:blipFill>
-        <p:spPr>
-          <a:xfrm>
-            <a:off x="4255049" y="1825625"/>
-            <a:ext cx="3681901" cy="4351338"/>
-          </a:xfrm>
-        </p:spPr>
-      </p:pic>
-    </p:spTree>
-    <p:extLst>
-      <p:ext uri="{BB962C8B-B14F-4D97-AF65-F5344CB8AC3E}">
-        <p14:creationId xmlns:p14="http://schemas.microsoft.com/office/powerpoint/2010/main" val="2571953755"/>
-      </p:ext>
-    </p:extLst>
-  </p:cSld>
-  <p:clrMapOvr>
-    <a:masterClrMapping/>
-  </p:clrMapOvr>
-</p:sld>
-</file>
-
 <file path=ppt/slides/slide9.xml><?xml version="1.0" encoding="utf-8"?>
 <p:sld xmlns:a="http://schemas.openxmlformats.org/drawingml/2006/main" xmlns:r="http://schemas.openxmlformats.org/officeDocument/2006/relationships" xmlns:p="http://schemas.openxmlformats.org/presentationml/2006/main">
   <p:cSld>
@@ -9565,7 +9921,7 @@
           <p:cNvPr id="2" name="Заголовок 1">
             <a:extLst>
               <a:ext uri="{FF2B5EF4-FFF2-40B4-BE49-F238E27FC236}">
-                <a16:creationId xmlns:a16="http://schemas.microsoft.com/office/drawing/2014/main" id="{80B4E1DD-F430-E0D5-C82C-5B128FEB9912}"/>
+                <a16:creationId xmlns:a16="http://schemas.microsoft.com/office/drawing/2014/main" id="{497EDA70-7D44-62BF-EFA2-4CCD15B3AD07}"/>
               </a:ext>
             </a:extLst>
           </p:cNvPr>
@@ -9583,7 +9939,7 @@
           <a:p>
             <a:r>
               <a:rPr lang="ru-RU" dirty="0"/>
-              <a:t>Разрешима ли задача?</a:t>
+              <a:t>Важно знать</a:t>
             </a:r>
           </a:p>
         </p:txBody>
@@ -9593,7 +9949,7 @@
           <p:cNvPr id="3" name="Текст 2">
             <a:extLst>
               <a:ext uri="{FF2B5EF4-FFF2-40B4-BE49-F238E27FC236}">
-                <a16:creationId xmlns:a16="http://schemas.microsoft.com/office/drawing/2014/main" id="{41182EB7-0131-4109-95DD-2B334CE3270A}"/>
+                <a16:creationId xmlns:a16="http://schemas.microsoft.com/office/drawing/2014/main" id="{D6F8E4FC-1230-68B8-31FA-82EFA829B055}"/>
               </a:ext>
             </a:extLst>
           </p:cNvPr>
@@ -9611,36 +9967,15 @@
           <a:p>
             <a:r>
               <a:rPr lang="ru-RU" dirty="0"/>
-              <a:t>Доказательства, </a:t>
-            </a:r>
-            <a:r>
-              <a:rPr lang="en-US" dirty="0"/>
-              <a:t>NP-</a:t>
-            </a:r>
-            <a:r>
-              <a:rPr lang="ru-RU" dirty="0"/>
-              <a:t>трудность и </a:t>
-            </a:r>
-            <a:r>
-              <a:rPr lang="en-US" dirty="0"/>
-              <a:t>NP-</a:t>
-            </a:r>
-            <a:r>
-              <a:rPr lang="ru-RU" dirty="0"/>
-              <a:t>полнота.</a:t>
-            </a:r>
-            <a:r>
-              <a:rPr lang="en-US" dirty="0"/>
-              <a:t> </a:t>
-            </a:r>
-            <a:endParaRPr lang="ru-RU" dirty="0"/>
+              <a:t>Уточняющие моменты.</a:t>
+            </a:r>
           </a:p>
         </p:txBody>
       </p:sp>
     </p:spTree>
     <p:extLst>
       <p:ext uri="{BB962C8B-B14F-4D97-AF65-F5344CB8AC3E}">
-        <p14:creationId xmlns:p14="http://schemas.microsoft.com/office/powerpoint/2010/main" val="1478404042"/>
+        <p14:creationId xmlns:p14="http://schemas.microsoft.com/office/powerpoint/2010/main" val="998850827"/>
       </p:ext>
     </p:extLst>
   </p:cSld>
